--- a/templates/carousels/posts/12-10-2026-mon-field-notes.pptx
+++ b/templates/carousels/posts/12-10-2026-mon-field-notes.pptx
@@ -3889,7 +3889,7 @@
     <p:bg>
       <p:bgPr>
         <a:solidFill>
-          <a:srgbClr val="F4F1EA"/>
+          <a:srgbClr val="F3F1EA"/>
         </a:solidFill>
         <a:effectLst/>
       </p:bgPr>
@@ -3916,7 +3916,7 @@
             <a:avLst/>
           </a:prstGeom>
           <a:solidFill>
-            <a:srgbClr val="A7B097"/>
+            <a:srgbClr val="B1BCB1"/>
           </a:solidFill>
           <a:ln>
             <a:noFill/>
@@ -3960,7 +3960,7 @@
             <a:avLst/>
           </a:prstGeom>
           <a:solidFill>
-            <a:srgbClr val="A7B097"/>
+            <a:srgbClr val="B1BCB1"/>
           </a:solidFill>
           <a:ln>
             <a:noFill/>
@@ -4004,7 +4004,7 @@
             <a:avLst/>
           </a:prstGeom>
           <a:solidFill>
-            <a:srgbClr val="A7B097"/>
+            <a:srgbClr val="B1BCB1"/>
           </a:solidFill>
           <a:ln>
             <a:noFill/>
@@ -4048,7 +4048,7 @@
             <a:avLst/>
           </a:prstGeom>
           <a:solidFill>
-            <a:srgbClr val="A7B097"/>
+            <a:srgbClr val="B1BCB1"/>
           </a:solidFill>
           <a:ln>
             <a:noFill/>
@@ -4092,7 +4092,7 @@
             <a:avLst/>
           </a:prstGeom>
           <a:solidFill>
-            <a:srgbClr val="A7B097"/>
+            <a:srgbClr val="B1BCB1"/>
           </a:solidFill>
           <a:ln>
             <a:noFill/>
@@ -4136,7 +4136,7 @@
             <a:avLst/>
           </a:prstGeom>
           <a:solidFill>
-            <a:srgbClr val="A7B097"/>
+            <a:srgbClr val="B1BCB1"/>
           </a:solidFill>
           <a:ln>
             <a:noFill/>
@@ -4180,7 +4180,7 @@
             <a:avLst/>
           </a:prstGeom>
           <a:solidFill>
-            <a:srgbClr val="A7B097"/>
+            <a:srgbClr val="B1BCB1"/>
           </a:solidFill>
           <a:ln>
             <a:noFill/>
@@ -4224,7 +4224,7 @@
             <a:avLst/>
           </a:prstGeom>
           <a:solidFill>
-            <a:srgbClr val="A7B097"/>
+            <a:srgbClr val="B1BCB1"/>
           </a:solidFill>
           <a:ln>
             <a:noFill/>
@@ -4268,7 +4268,7 @@
             <a:avLst/>
           </a:prstGeom>
           <a:solidFill>
-            <a:srgbClr val="A7B097"/>
+            <a:srgbClr val="B1BCB1"/>
           </a:solidFill>
           <a:ln>
             <a:noFill/>
@@ -4312,7 +4312,7 @@
             <a:avLst/>
           </a:prstGeom>
           <a:solidFill>
-            <a:srgbClr val="A7B097"/>
+            <a:srgbClr val="B1BCB1"/>
           </a:solidFill>
           <a:ln>
             <a:noFill/>
@@ -4356,7 +4356,7 @@
             <a:avLst/>
           </a:prstGeom>
           <a:solidFill>
-            <a:srgbClr val="A7B097"/>
+            <a:srgbClr val="B1BCB1"/>
           </a:solidFill>
           <a:ln>
             <a:noFill/>
@@ -4400,7 +4400,7 @@
             <a:avLst/>
           </a:prstGeom>
           <a:solidFill>
-            <a:srgbClr val="A7B097"/>
+            <a:srgbClr val="B1BCB1"/>
           </a:solidFill>
           <a:ln>
             <a:noFill/>
@@ -4444,7 +4444,7 @@
             <a:avLst/>
           </a:prstGeom>
           <a:solidFill>
-            <a:srgbClr val="A7B097"/>
+            <a:srgbClr val="B1BCB1"/>
           </a:solidFill>
           <a:ln>
             <a:noFill/>
@@ -4488,7 +4488,7 @@
             <a:avLst/>
           </a:prstGeom>
           <a:solidFill>
-            <a:srgbClr val="A7B097"/>
+            <a:srgbClr val="B1BCB1"/>
           </a:solidFill>
           <a:ln>
             <a:noFill/>
@@ -4532,7 +4532,7 @@
             <a:avLst/>
           </a:prstGeom>
           <a:solidFill>
-            <a:srgbClr val="A7B097"/>
+            <a:srgbClr val="B1BCB1"/>
           </a:solidFill>
           <a:ln>
             <a:noFill/>
@@ -4576,7 +4576,7 @@
             <a:avLst/>
           </a:prstGeom>
           <a:solidFill>
-            <a:srgbClr val="A7B097"/>
+            <a:srgbClr val="B1BCB1"/>
           </a:solidFill>
           <a:ln>
             <a:noFill/>
@@ -4620,7 +4620,7 @@
             <a:avLst/>
           </a:prstGeom>
           <a:solidFill>
-            <a:srgbClr val="A7B097"/>
+            <a:srgbClr val="B1BCB1"/>
           </a:solidFill>
           <a:ln>
             <a:noFill/>
@@ -4664,7 +4664,7 @@
             <a:avLst/>
           </a:prstGeom>
           <a:solidFill>
-            <a:srgbClr val="A7B097"/>
+            <a:srgbClr val="B1BCB1"/>
           </a:solidFill>
           <a:ln>
             <a:noFill/>
@@ -4708,7 +4708,7 @@
             <a:avLst/>
           </a:prstGeom>
           <a:solidFill>
-            <a:srgbClr val="A7B097"/>
+            <a:srgbClr val="B1BCB1"/>
           </a:solidFill>
           <a:ln>
             <a:noFill/>
@@ -4752,7 +4752,7 @@
             <a:avLst/>
           </a:prstGeom>
           <a:solidFill>
-            <a:srgbClr val="A7B097"/>
+            <a:srgbClr val="B1BCB1"/>
           </a:solidFill>
           <a:ln>
             <a:noFill/>
@@ -4807,7 +4807,7 @@
             <a:r>
               <a:rPr sz="3000" b="1" i="0">
                 <a:solidFill>
-                  <a:srgbClr val="156826"/>
+                  <a:srgbClr val="31662F"/>
                 </a:solidFill>
                 <a:latin typeface="Montserrat"/>
               </a:rPr>
@@ -4819,7 +4819,7 @@
             <a:r>
               <a:rPr sz="3000" b="1" i="0">
                 <a:solidFill>
-                  <a:srgbClr val="156826"/>
+                  <a:srgbClr val="31662F"/>
                 </a:solidFill>
                 <a:latin typeface="Montserrat"/>
               </a:rPr>
@@ -4854,7 +4854,7 @@
             <a:r>
               <a:rPr sz="3000" b="1" i="0">
                 <a:solidFill>
-                  <a:srgbClr val="156826"/>
+                  <a:srgbClr val="31662F"/>
                 </a:solidFill>
                 <a:latin typeface="Montserrat"/>
               </a:rPr>
@@ -4893,7 +4893,7 @@
             <a:r>
               <a:rPr sz="5700" b="1" i="0">
                 <a:solidFill>
-                  <a:srgbClr val="22371F"/>
+                  <a:srgbClr val="1E3F1D"/>
                 </a:solidFill>
                 <a:latin typeface="Montserrat"/>
               </a:rPr>
@@ -4928,7 +4928,7 @@
             <a:r>
               <a:rPr sz="5700" b="0" i="1">
                 <a:solidFill>
-                  <a:srgbClr val="156826"/>
+                  <a:srgbClr val="31662F"/>
                 </a:solidFill>
                 <a:latin typeface="EB Garamond"/>
               </a:rPr>
@@ -4940,7 +4940,7 @@
             <a:r>
               <a:rPr sz="5700" b="0" i="1">
                 <a:solidFill>
-                  <a:srgbClr val="156826"/>
+                  <a:srgbClr val="31662F"/>
                 </a:solidFill>
                 <a:latin typeface="EB Garamond"/>
               </a:rPr>
@@ -4951,7 +4951,7 @@
       </p:sp>
       <p:pic>
         <p:nvPicPr>
-          <p:cNvPr id="26" name="Picture 25" descr="st2071964333694664066.png"/>
+          <p:cNvPr id="26" name="Picture 25" descr="st5027811336302456086.png"/>
           <p:cNvPicPr>
             <a:picLocks noChangeAspect="1"/>
           </p:cNvPicPr>
@@ -4988,7 +4988,7 @@
             <a:avLst/>
           </a:prstGeom>
           <a:solidFill>
-            <a:srgbClr val="156826"/>
+            <a:srgbClr val="31662F"/>
           </a:solidFill>
           <a:ln>
             <a:noFill/>
@@ -5032,7 +5032,7 @@
             <a:avLst/>
           </a:prstGeom>
           <a:solidFill>
-            <a:srgbClr val="A7B097"/>
+            <a:srgbClr val="B1BCB1"/>
           </a:solidFill>
           <a:ln>
             <a:noFill/>
@@ -5076,7 +5076,7 @@
             <a:avLst/>
           </a:prstGeom>
           <a:solidFill>
-            <a:srgbClr val="A7B097"/>
+            <a:srgbClr val="B1BCB1"/>
           </a:solidFill>
           <a:ln>
             <a:noFill/>
@@ -5120,7 +5120,7 @@
             <a:avLst/>
           </a:prstGeom>
           <a:solidFill>
-            <a:srgbClr val="A7B097"/>
+            <a:srgbClr val="B1BCB1"/>
           </a:solidFill>
           <a:ln>
             <a:noFill/>
@@ -5164,7 +5164,7 @@
             <a:avLst/>
           </a:prstGeom>
           <a:solidFill>
-            <a:srgbClr val="A7B097"/>
+            <a:srgbClr val="B1BCB1"/>
           </a:solidFill>
           <a:ln>
             <a:noFill/>
@@ -5208,7 +5208,7 @@
             <a:avLst/>
           </a:prstGeom>
           <a:solidFill>
-            <a:srgbClr val="A7B097"/>
+            <a:srgbClr val="B1BCB1"/>
           </a:solidFill>
           <a:ln>
             <a:noFill/>
@@ -5251,7 +5251,7 @@
     <p:bg>
       <p:bgPr>
         <a:solidFill>
-          <a:srgbClr val="F4F1EA"/>
+          <a:srgbClr val="F3F1EA"/>
         </a:solidFill>
         <a:effectLst/>
       </p:bgPr>
@@ -5278,7 +5278,7 @@
             <a:avLst/>
           </a:prstGeom>
           <a:solidFill>
-            <a:srgbClr val="A7B097"/>
+            <a:srgbClr val="B1BCB1"/>
           </a:solidFill>
           <a:ln>
             <a:noFill/>
@@ -5322,7 +5322,7 @@
             <a:avLst/>
           </a:prstGeom>
           <a:solidFill>
-            <a:srgbClr val="A7B097"/>
+            <a:srgbClr val="B1BCB1"/>
           </a:solidFill>
           <a:ln>
             <a:noFill/>
@@ -5366,7 +5366,7 @@
             <a:avLst/>
           </a:prstGeom>
           <a:solidFill>
-            <a:srgbClr val="A7B097"/>
+            <a:srgbClr val="B1BCB1"/>
           </a:solidFill>
           <a:ln>
             <a:noFill/>
@@ -5410,7 +5410,7 @@
             <a:avLst/>
           </a:prstGeom>
           <a:solidFill>
-            <a:srgbClr val="A7B097"/>
+            <a:srgbClr val="B1BCB1"/>
           </a:solidFill>
           <a:ln>
             <a:noFill/>
@@ -5454,7 +5454,7 @@
             <a:avLst/>
           </a:prstGeom>
           <a:solidFill>
-            <a:srgbClr val="A7B097"/>
+            <a:srgbClr val="B1BCB1"/>
           </a:solidFill>
           <a:ln>
             <a:noFill/>
@@ -5498,7 +5498,7 @@
             <a:avLst/>
           </a:prstGeom>
           <a:solidFill>
-            <a:srgbClr val="A7B097"/>
+            <a:srgbClr val="B1BCB1"/>
           </a:solidFill>
           <a:ln>
             <a:noFill/>
@@ -5542,7 +5542,7 @@
             <a:avLst/>
           </a:prstGeom>
           <a:solidFill>
-            <a:srgbClr val="A7B097"/>
+            <a:srgbClr val="B1BCB1"/>
           </a:solidFill>
           <a:ln>
             <a:noFill/>
@@ -5586,7 +5586,7 @@
             <a:avLst/>
           </a:prstGeom>
           <a:solidFill>
-            <a:srgbClr val="A7B097"/>
+            <a:srgbClr val="B1BCB1"/>
           </a:solidFill>
           <a:ln>
             <a:noFill/>
@@ -5630,7 +5630,7 @@
             <a:avLst/>
           </a:prstGeom>
           <a:solidFill>
-            <a:srgbClr val="A7B097"/>
+            <a:srgbClr val="B1BCB1"/>
           </a:solidFill>
           <a:ln>
             <a:noFill/>
@@ -5674,7 +5674,7 @@
             <a:avLst/>
           </a:prstGeom>
           <a:solidFill>
-            <a:srgbClr val="A7B097"/>
+            <a:srgbClr val="B1BCB1"/>
           </a:solidFill>
           <a:ln>
             <a:noFill/>
@@ -5718,7 +5718,7 @@
             <a:avLst/>
           </a:prstGeom>
           <a:solidFill>
-            <a:srgbClr val="A7B097"/>
+            <a:srgbClr val="B1BCB1"/>
           </a:solidFill>
           <a:ln>
             <a:noFill/>
@@ -5762,7 +5762,7 @@
             <a:avLst/>
           </a:prstGeom>
           <a:solidFill>
-            <a:srgbClr val="A7B097"/>
+            <a:srgbClr val="B1BCB1"/>
           </a:solidFill>
           <a:ln>
             <a:noFill/>
@@ -5806,7 +5806,7 @@
             <a:avLst/>
           </a:prstGeom>
           <a:solidFill>
-            <a:srgbClr val="A7B097"/>
+            <a:srgbClr val="B1BCB1"/>
           </a:solidFill>
           <a:ln>
             <a:noFill/>
@@ -5850,7 +5850,7 @@
             <a:avLst/>
           </a:prstGeom>
           <a:solidFill>
-            <a:srgbClr val="A7B097"/>
+            <a:srgbClr val="B1BCB1"/>
           </a:solidFill>
           <a:ln>
             <a:noFill/>
@@ -5894,7 +5894,7 @@
             <a:avLst/>
           </a:prstGeom>
           <a:solidFill>
-            <a:srgbClr val="A7B097"/>
+            <a:srgbClr val="B1BCB1"/>
           </a:solidFill>
           <a:ln>
             <a:noFill/>
@@ -5938,7 +5938,7 @@
             <a:avLst/>
           </a:prstGeom>
           <a:solidFill>
-            <a:srgbClr val="A7B097"/>
+            <a:srgbClr val="B1BCB1"/>
           </a:solidFill>
           <a:ln>
             <a:noFill/>
@@ -5982,7 +5982,7 @@
             <a:avLst/>
           </a:prstGeom>
           <a:solidFill>
-            <a:srgbClr val="A7B097"/>
+            <a:srgbClr val="B1BCB1"/>
           </a:solidFill>
           <a:ln>
             <a:noFill/>
@@ -6026,7 +6026,7 @@
             <a:avLst/>
           </a:prstGeom>
           <a:solidFill>
-            <a:srgbClr val="A7B097"/>
+            <a:srgbClr val="B1BCB1"/>
           </a:solidFill>
           <a:ln>
             <a:noFill/>
@@ -6070,7 +6070,7 @@
             <a:avLst/>
           </a:prstGeom>
           <a:solidFill>
-            <a:srgbClr val="A7B097"/>
+            <a:srgbClr val="B1BCB1"/>
           </a:solidFill>
           <a:ln>
             <a:noFill/>
@@ -6114,7 +6114,7 @@
             <a:avLst/>
           </a:prstGeom>
           <a:solidFill>
-            <a:srgbClr val="A7B097"/>
+            <a:srgbClr val="B1BCB1"/>
           </a:solidFill>
           <a:ln>
             <a:noFill/>
@@ -6169,7 +6169,7 @@
             <a:r>
               <a:rPr sz="3000" b="1" i="0">
                 <a:solidFill>
-                  <a:srgbClr val="156826"/>
+                  <a:srgbClr val="31662F"/>
                 </a:solidFill>
                 <a:latin typeface="Montserrat"/>
               </a:rPr>
@@ -6181,7 +6181,7 @@
             <a:r>
               <a:rPr sz="3000" b="1" i="0">
                 <a:solidFill>
-                  <a:srgbClr val="156826"/>
+                  <a:srgbClr val="31662F"/>
                 </a:solidFill>
                 <a:latin typeface="Montserrat"/>
               </a:rPr>
@@ -6216,7 +6216,7 @@
             <a:r>
               <a:rPr sz="3000" b="1" i="0">
                 <a:solidFill>
-                  <a:srgbClr val="156826"/>
+                  <a:srgbClr val="31662F"/>
                 </a:solidFill>
                 <a:latin typeface="Montserrat"/>
               </a:rPr>
@@ -6255,7 +6255,7 @@
             <a:r>
               <a:rPr sz="5700" b="0" i="0">
                 <a:solidFill>
-                  <a:srgbClr val="22371F"/>
+                  <a:srgbClr val="1E3F1D"/>
                 </a:solidFill>
                 <a:latin typeface="EB Garamond"/>
               </a:rPr>
@@ -6279,7 +6279,7 @@
             <a:avLst/>
           </a:prstGeom>
           <a:solidFill>
-            <a:srgbClr val="A7B097"/>
+            <a:srgbClr val="B1BCB1"/>
           </a:solidFill>
           <a:ln>
             <a:noFill/>
@@ -6323,7 +6323,7 @@
             <a:avLst/>
           </a:prstGeom>
           <a:solidFill>
-            <a:srgbClr val="156826"/>
+            <a:srgbClr val="31662F"/>
           </a:solidFill>
           <a:ln>
             <a:noFill/>
@@ -6367,7 +6367,7 @@
             <a:avLst/>
           </a:prstGeom>
           <a:solidFill>
-            <a:srgbClr val="A7B097"/>
+            <a:srgbClr val="B1BCB1"/>
           </a:solidFill>
           <a:ln>
             <a:noFill/>
@@ -6411,7 +6411,7 @@
             <a:avLst/>
           </a:prstGeom>
           <a:solidFill>
-            <a:srgbClr val="A7B097"/>
+            <a:srgbClr val="B1BCB1"/>
           </a:solidFill>
           <a:ln>
             <a:noFill/>
@@ -6455,7 +6455,7 @@
             <a:avLst/>
           </a:prstGeom>
           <a:solidFill>
-            <a:srgbClr val="A7B097"/>
+            <a:srgbClr val="B1BCB1"/>
           </a:solidFill>
           <a:ln>
             <a:noFill/>
@@ -6499,7 +6499,7 @@
             <a:avLst/>
           </a:prstGeom>
           <a:solidFill>
-            <a:srgbClr val="A7B097"/>
+            <a:srgbClr val="B1BCB1"/>
           </a:solidFill>
           <a:ln>
             <a:noFill/>
@@ -6542,7 +6542,7 @@
     <p:bg>
       <p:bgPr>
         <a:solidFill>
-          <a:srgbClr val="F4F1EA"/>
+          <a:srgbClr val="F3F1EA"/>
         </a:solidFill>
         <a:effectLst/>
       </p:bgPr>
@@ -6569,7 +6569,7 @@
             <a:avLst/>
           </a:prstGeom>
           <a:solidFill>
-            <a:srgbClr val="A7B097"/>
+            <a:srgbClr val="B1BCB1"/>
           </a:solidFill>
           <a:ln>
             <a:noFill/>
@@ -6613,7 +6613,7 @@
             <a:avLst/>
           </a:prstGeom>
           <a:solidFill>
-            <a:srgbClr val="A7B097"/>
+            <a:srgbClr val="B1BCB1"/>
           </a:solidFill>
           <a:ln>
             <a:noFill/>
@@ -6657,7 +6657,7 @@
             <a:avLst/>
           </a:prstGeom>
           <a:solidFill>
-            <a:srgbClr val="A7B097"/>
+            <a:srgbClr val="B1BCB1"/>
           </a:solidFill>
           <a:ln>
             <a:noFill/>
@@ -6701,7 +6701,7 @@
             <a:avLst/>
           </a:prstGeom>
           <a:solidFill>
-            <a:srgbClr val="A7B097"/>
+            <a:srgbClr val="B1BCB1"/>
           </a:solidFill>
           <a:ln>
             <a:noFill/>
@@ -6745,7 +6745,7 @@
             <a:avLst/>
           </a:prstGeom>
           <a:solidFill>
-            <a:srgbClr val="A7B097"/>
+            <a:srgbClr val="B1BCB1"/>
           </a:solidFill>
           <a:ln>
             <a:noFill/>
@@ -6789,7 +6789,7 @@
             <a:avLst/>
           </a:prstGeom>
           <a:solidFill>
-            <a:srgbClr val="A7B097"/>
+            <a:srgbClr val="B1BCB1"/>
           </a:solidFill>
           <a:ln>
             <a:noFill/>
@@ -6833,7 +6833,7 @@
             <a:avLst/>
           </a:prstGeom>
           <a:solidFill>
-            <a:srgbClr val="A7B097"/>
+            <a:srgbClr val="B1BCB1"/>
           </a:solidFill>
           <a:ln>
             <a:noFill/>
@@ -6877,7 +6877,7 @@
             <a:avLst/>
           </a:prstGeom>
           <a:solidFill>
-            <a:srgbClr val="A7B097"/>
+            <a:srgbClr val="B1BCB1"/>
           </a:solidFill>
           <a:ln>
             <a:noFill/>
@@ -6921,7 +6921,7 @@
             <a:avLst/>
           </a:prstGeom>
           <a:solidFill>
-            <a:srgbClr val="A7B097"/>
+            <a:srgbClr val="B1BCB1"/>
           </a:solidFill>
           <a:ln>
             <a:noFill/>
@@ -6965,7 +6965,7 @@
             <a:avLst/>
           </a:prstGeom>
           <a:solidFill>
-            <a:srgbClr val="A7B097"/>
+            <a:srgbClr val="B1BCB1"/>
           </a:solidFill>
           <a:ln>
             <a:noFill/>
@@ -7009,7 +7009,7 @@
             <a:avLst/>
           </a:prstGeom>
           <a:solidFill>
-            <a:srgbClr val="A7B097"/>
+            <a:srgbClr val="B1BCB1"/>
           </a:solidFill>
           <a:ln>
             <a:noFill/>
@@ -7053,7 +7053,7 @@
             <a:avLst/>
           </a:prstGeom>
           <a:solidFill>
-            <a:srgbClr val="A7B097"/>
+            <a:srgbClr val="B1BCB1"/>
           </a:solidFill>
           <a:ln>
             <a:noFill/>
@@ -7097,7 +7097,7 @@
             <a:avLst/>
           </a:prstGeom>
           <a:solidFill>
-            <a:srgbClr val="A7B097"/>
+            <a:srgbClr val="B1BCB1"/>
           </a:solidFill>
           <a:ln>
             <a:noFill/>
@@ -7141,7 +7141,7 @@
             <a:avLst/>
           </a:prstGeom>
           <a:solidFill>
-            <a:srgbClr val="A7B097"/>
+            <a:srgbClr val="B1BCB1"/>
           </a:solidFill>
           <a:ln>
             <a:noFill/>
@@ -7185,7 +7185,7 @@
             <a:avLst/>
           </a:prstGeom>
           <a:solidFill>
-            <a:srgbClr val="A7B097"/>
+            <a:srgbClr val="B1BCB1"/>
           </a:solidFill>
           <a:ln>
             <a:noFill/>
@@ -7229,7 +7229,7 @@
             <a:avLst/>
           </a:prstGeom>
           <a:solidFill>
-            <a:srgbClr val="A7B097"/>
+            <a:srgbClr val="B1BCB1"/>
           </a:solidFill>
           <a:ln>
             <a:noFill/>
@@ -7273,7 +7273,7 @@
             <a:avLst/>
           </a:prstGeom>
           <a:solidFill>
-            <a:srgbClr val="A7B097"/>
+            <a:srgbClr val="B1BCB1"/>
           </a:solidFill>
           <a:ln>
             <a:noFill/>
@@ -7317,7 +7317,7 @@
             <a:avLst/>
           </a:prstGeom>
           <a:solidFill>
-            <a:srgbClr val="A7B097"/>
+            <a:srgbClr val="B1BCB1"/>
           </a:solidFill>
           <a:ln>
             <a:noFill/>
@@ -7361,7 +7361,7 @@
             <a:avLst/>
           </a:prstGeom>
           <a:solidFill>
-            <a:srgbClr val="A7B097"/>
+            <a:srgbClr val="B1BCB1"/>
           </a:solidFill>
           <a:ln>
             <a:noFill/>
@@ -7405,7 +7405,7 @@
             <a:avLst/>
           </a:prstGeom>
           <a:solidFill>
-            <a:srgbClr val="A7B097"/>
+            <a:srgbClr val="B1BCB1"/>
           </a:solidFill>
           <a:ln>
             <a:noFill/>
@@ -7460,7 +7460,7 @@
             <a:r>
               <a:rPr sz="3000" b="1" i="0">
                 <a:solidFill>
-                  <a:srgbClr val="156826"/>
+                  <a:srgbClr val="31662F"/>
                 </a:solidFill>
                 <a:latin typeface="Montserrat"/>
               </a:rPr>
@@ -7472,7 +7472,7 @@
             <a:r>
               <a:rPr sz="3000" b="1" i="0">
                 <a:solidFill>
-                  <a:srgbClr val="156826"/>
+                  <a:srgbClr val="31662F"/>
                 </a:solidFill>
                 <a:latin typeface="Montserrat"/>
               </a:rPr>
@@ -7507,7 +7507,7 @@
             <a:r>
               <a:rPr sz="3000" b="1" i="0">
                 <a:solidFill>
-                  <a:srgbClr val="156826"/>
+                  <a:srgbClr val="31662F"/>
                 </a:solidFill>
                 <a:latin typeface="Montserrat"/>
               </a:rPr>
@@ -7542,7 +7542,7 @@
             <a:r>
               <a:rPr sz="5400" b="1" i="0">
                 <a:solidFill>
-                  <a:srgbClr val="156826"/>
+                  <a:srgbClr val="31662F"/>
                 </a:solidFill>
                 <a:latin typeface="Montserrat"/>
               </a:rPr>
@@ -7581,7 +7581,7 @@
             <a:r>
               <a:rPr sz="5700" b="0" i="0">
                 <a:solidFill>
-                  <a:srgbClr val="22371F"/>
+                  <a:srgbClr val="1E3F1D"/>
                 </a:solidFill>
                 <a:latin typeface="EB Garamond"/>
               </a:rPr>
@@ -7616,7 +7616,7 @@
             <a:r>
               <a:rPr sz="5400" b="1" i="0">
                 <a:solidFill>
-                  <a:srgbClr val="156826"/>
+                  <a:srgbClr val="31662F"/>
                 </a:solidFill>
                 <a:latin typeface="Montserrat"/>
               </a:rPr>
@@ -7655,7 +7655,7 @@
             <a:r>
               <a:rPr sz="5700" b="0" i="0">
                 <a:solidFill>
-                  <a:srgbClr val="22371F"/>
+                  <a:srgbClr val="1E3F1D"/>
                 </a:solidFill>
                 <a:latin typeface="EB Garamond"/>
               </a:rPr>
@@ -7690,7 +7690,7 @@
             <a:r>
               <a:rPr sz="5400" b="1" i="0">
                 <a:solidFill>
-                  <a:srgbClr val="156826"/>
+                  <a:srgbClr val="31662F"/>
                 </a:solidFill>
                 <a:latin typeface="Montserrat"/>
               </a:rPr>
@@ -7729,7 +7729,7 @@
             <a:r>
               <a:rPr sz="5700" b="0" i="0">
                 <a:solidFill>
-                  <a:srgbClr val="22371F"/>
+                  <a:srgbClr val="1E3F1D"/>
                 </a:solidFill>
                 <a:latin typeface="EB Garamond"/>
               </a:rPr>
@@ -7753,7 +7753,7 @@
             <a:avLst/>
           </a:prstGeom>
           <a:solidFill>
-            <a:srgbClr val="A7B097"/>
+            <a:srgbClr val="B1BCB1"/>
           </a:solidFill>
           <a:ln>
             <a:noFill/>
@@ -7797,7 +7797,7 @@
             <a:avLst/>
           </a:prstGeom>
           <a:solidFill>
-            <a:srgbClr val="A7B097"/>
+            <a:srgbClr val="B1BCB1"/>
           </a:solidFill>
           <a:ln>
             <a:noFill/>
@@ -7841,7 +7841,7 @@
             <a:avLst/>
           </a:prstGeom>
           <a:solidFill>
-            <a:srgbClr val="156826"/>
+            <a:srgbClr val="31662F"/>
           </a:solidFill>
           <a:ln>
             <a:noFill/>
@@ -7885,7 +7885,7 @@
             <a:avLst/>
           </a:prstGeom>
           <a:solidFill>
-            <a:srgbClr val="A7B097"/>
+            <a:srgbClr val="B1BCB1"/>
           </a:solidFill>
           <a:ln>
             <a:noFill/>
@@ -7929,7 +7929,7 @@
             <a:avLst/>
           </a:prstGeom>
           <a:solidFill>
-            <a:srgbClr val="A7B097"/>
+            <a:srgbClr val="B1BCB1"/>
           </a:solidFill>
           <a:ln>
             <a:noFill/>
@@ -7973,7 +7973,7 @@
             <a:avLst/>
           </a:prstGeom>
           <a:solidFill>
-            <a:srgbClr val="A7B097"/>
+            <a:srgbClr val="B1BCB1"/>
           </a:solidFill>
           <a:ln>
             <a:noFill/>
@@ -8016,7 +8016,7 @@
     <p:bg>
       <p:bgPr>
         <a:solidFill>
-          <a:srgbClr val="F4F1EA"/>
+          <a:srgbClr val="F3F1EA"/>
         </a:solidFill>
         <a:effectLst/>
       </p:bgPr>
@@ -8043,7 +8043,7 @@
             <a:avLst/>
           </a:prstGeom>
           <a:solidFill>
-            <a:srgbClr val="A7B097"/>
+            <a:srgbClr val="B1BCB1"/>
           </a:solidFill>
           <a:ln>
             <a:noFill/>
@@ -8087,7 +8087,7 @@
             <a:avLst/>
           </a:prstGeom>
           <a:solidFill>
-            <a:srgbClr val="A7B097"/>
+            <a:srgbClr val="B1BCB1"/>
           </a:solidFill>
           <a:ln>
             <a:noFill/>
@@ -8131,7 +8131,7 @@
             <a:avLst/>
           </a:prstGeom>
           <a:solidFill>
-            <a:srgbClr val="A7B097"/>
+            <a:srgbClr val="B1BCB1"/>
           </a:solidFill>
           <a:ln>
             <a:noFill/>
@@ -8175,7 +8175,7 @@
             <a:avLst/>
           </a:prstGeom>
           <a:solidFill>
-            <a:srgbClr val="A7B097"/>
+            <a:srgbClr val="B1BCB1"/>
           </a:solidFill>
           <a:ln>
             <a:noFill/>
@@ -8219,7 +8219,7 @@
             <a:avLst/>
           </a:prstGeom>
           <a:solidFill>
-            <a:srgbClr val="A7B097"/>
+            <a:srgbClr val="B1BCB1"/>
           </a:solidFill>
           <a:ln>
             <a:noFill/>
@@ -8263,7 +8263,7 @@
             <a:avLst/>
           </a:prstGeom>
           <a:solidFill>
-            <a:srgbClr val="A7B097"/>
+            <a:srgbClr val="B1BCB1"/>
           </a:solidFill>
           <a:ln>
             <a:noFill/>
@@ -8307,7 +8307,7 @@
             <a:avLst/>
           </a:prstGeom>
           <a:solidFill>
-            <a:srgbClr val="A7B097"/>
+            <a:srgbClr val="B1BCB1"/>
           </a:solidFill>
           <a:ln>
             <a:noFill/>
@@ -8351,7 +8351,7 @@
             <a:avLst/>
           </a:prstGeom>
           <a:solidFill>
-            <a:srgbClr val="A7B097"/>
+            <a:srgbClr val="B1BCB1"/>
           </a:solidFill>
           <a:ln>
             <a:noFill/>
@@ -8395,7 +8395,7 @@
             <a:avLst/>
           </a:prstGeom>
           <a:solidFill>
-            <a:srgbClr val="A7B097"/>
+            <a:srgbClr val="B1BCB1"/>
           </a:solidFill>
           <a:ln>
             <a:noFill/>
@@ -8439,7 +8439,7 @@
             <a:avLst/>
           </a:prstGeom>
           <a:solidFill>
-            <a:srgbClr val="A7B097"/>
+            <a:srgbClr val="B1BCB1"/>
           </a:solidFill>
           <a:ln>
             <a:noFill/>
@@ -8483,7 +8483,7 @@
             <a:avLst/>
           </a:prstGeom>
           <a:solidFill>
-            <a:srgbClr val="A7B097"/>
+            <a:srgbClr val="B1BCB1"/>
           </a:solidFill>
           <a:ln>
             <a:noFill/>
@@ -8527,7 +8527,7 @@
             <a:avLst/>
           </a:prstGeom>
           <a:solidFill>
-            <a:srgbClr val="A7B097"/>
+            <a:srgbClr val="B1BCB1"/>
           </a:solidFill>
           <a:ln>
             <a:noFill/>
@@ -8571,7 +8571,7 @@
             <a:avLst/>
           </a:prstGeom>
           <a:solidFill>
-            <a:srgbClr val="A7B097"/>
+            <a:srgbClr val="B1BCB1"/>
           </a:solidFill>
           <a:ln>
             <a:noFill/>
@@ -8615,7 +8615,7 @@
             <a:avLst/>
           </a:prstGeom>
           <a:solidFill>
-            <a:srgbClr val="A7B097"/>
+            <a:srgbClr val="B1BCB1"/>
           </a:solidFill>
           <a:ln>
             <a:noFill/>
@@ -8659,7 +8659,7 @@
             <a:avLst/>
           </a:prstGeom>
           <a:solidFill>
-            <a:srgbClr val="A7B097"/>
+            <a:srgbClr val="B1BCB1"/>
           </a:solidFill>
           <a:ln>
             <a:noFill/>
@@ -8703,7 +8703,7 @@
             <a:avLst/>
           </a:prstGeom>
           <a:solidFill>
-            <a:srgbClr val="A7B097"/>
+            <a:srgbClr val="B1BCB1"/>
           </a:solidFill>
           <a:ln>
             <a:noFill/>
@@ -8747,7 +8747,7 @@
             <a:avLst/>
           </a:prstGeom>
           <a:solidFill>
-            <a:srgbClr val="A7B097"/>
+            <a:srgbClr val="B1BCB1"/>
           </a:solidFill>
           <a:ln>
             <a:noFill/>
@@ -8791,7 +8791,7 @@
             <a:avLst/>
           </a:prstGeom>
           <a:solidFill>
-            <a:srgbClr val="A7B097"/>
+            <a:srgbClr val="B1BCB1"/>
           </a:solidFill>
           <a:ln>
             <a:noFill/>
@@ -8835,7 +8835,7 @@
             <a:avLst/>
           </a:prstGeom>
           <a:solidFill>
-            <a:srgbClr val="A7B097"/>
+            <a:srgbClr val="B1BCB1"/>
           </a:solidFill>
           <a:ln>
             <a:noFill/>
@@ -8879,7 +8879,7 @@
             <a:avLst/>
           </a:prstGeom>
           <a:solidFill>
-            <a:srgbClr val="A7B097"/>
+            <a:srgbClr val="B1BCB1"/>
           </a:solidFill>
           <a:ln>
             <a:noFill/>
@@ -8934,7 +8934,7 @@
             <a:r>
               <a:rPr sz="3000" b="1" i="0">
                 <a:solidFill>
-                  <a:srgbClr val="156826"/>
+                  <a:srgbClr val="31662F"/>
                 </a:solidFill>
                 <a:latin typeface="Montserrat"/>
               </a:rPr>
@@ -8946,7 +8946,7 @@
             <a:r>
               <a:rPr sz="3000" b="1" i="0">
                 <a:solidFill>
-                  <a:srgbClr val="156826"/>
+                  <a:srgbClr val="31662F"/>
                 </a:solidFill>
                 <a:latin typeface="Montserrat"/>
               </a:rPr>
@@ -8981,7 +8981,7 @@
             <a:r>
               <a:rPr sz="3000" b="1" i="0">
                 <a:solidFill>
-                  <a:srgbClr val="156826"/>
+                  <a:srgbClr val="31662F"/>
                 </a:solidFill>
                 <a:latin typeface="Montserrat"/>
               </a:rPr>
@@ -9016,7 +9016,7 @@
             <a:r>
               <a:rPr sz="3000" b="1" i="0">
                 <a:solidFill>
-                  <a:srgbClr val="156826"/>
+                  <a:srgbClr val="31662F"/>
                 </a:solidFill>
                 <a:latin typeface="Montserrat"/>
               </a:rPr>
@@ -9051,7 +9051,7 @@
             <a:r>
               <a:rPr sz="7500" b="1" i="0">
                 <a:solidFill>
-                  <a:srgbClr val="156826"/>
+                  <a:srgbClr val="31662F"/>
                 </a:solidFill>
                 <a:latin typeface="Montserrat"/>
               </a:rPr>
@@ -9086,7 +9086,7 @@
             <a:r>
               <a:rPr sz="5700" b="0" i="0">
                 <a:solidFill>
-                  <a:srgbClr val="22371F"/>
+                  <a:srgbClr val="1E3F1D"/>
                 </a:solidFill>
                 <a:latin typeface="EB Garamond"/>
               </a:rPr>
@@ -9110,7 +9110,7 @@
             <a:avLst/>
           </a:prstGeom>
           <a:solidFill>
-            <a:srgbClr val="22371F"/>
+            <a:srgbClr val="1E3F1D"/>
           </a:solidFill>
           <a:ln>
             <a:noFill/>
@@ -9154,7 +9154,7 @@
             <a:avLst/>
           </a:prstGeom>
           <a:solidFill>
-            <a:srgbClr val="A7B097"/>
+            <a:srgbClr val="B1BCB1"/>
           </a:solidFill>
           <a:ln>
             <a:noFill/>
@@ -9198,7 +9198,7 @@
             <a:avLst/>
           </a:prstGeom>
           <a:solidFill>
-            <a:srgbClr val="156826"/>
+            <a:srgbClr val="31662F"/>
           </a:solidFill>
           <a:ln>
             <a:noFill/>
@@ -9253,7 +9253,7 @@
             <a:r>
               <a:rPr sz="3000" b="1" i="0">
                 <a:solidFill>
-                  <a:srgbClr val="22371F"/>
+                  <a:srgbClr val="1E3F1D"/>
                 </a:solidFill>
                 <a:latin typeface="Montserrat"/>
               </a:rPr>
@@ -9288,7 +9288,7 @@
             <a:r>
               <a:rPr sz="3000" b="1" i="0">
                 <a:solidFill>
-                  <a:srgbClr val="22371F"/>
+                  <a:srgbClr val="1E3F1D"/>
                 </a:solidFill>
                 <a:latin typeface="Montserrat"/>
               </a:rPr>
@@ -9347,7 +9347,7 @@
             <a:avLst/>
           </a:prstGeom>
           <a:solidFill>
-            <a:srgbClr val="A7B097"/>
+            <a:srgbClr val="B1BCB1"/>
           </a:solidFill>
           <a:ln>
             <a:noFill/>
@@ -9391,7 +9391,7 @@
             <a:avLst/>
           </a:prstGeom>
           <a:solidFill>
-            <a:srgbClr val="A7B097"/>
+            <a:srgbClr val="B1BCB1"/>
           </a:solidFill>
           <a:ln>
             <a:noFill/>
@@ -9435,7 +9435,7 @@
             <a:avLst/>
           </a:prstGeom>
           <a:solidFill>
-            <a:srgbClr val="A7B097"/>
+            <a:srgbClr val="B1BCB1"/>
           </a:solidFill>
           <a:ln>
             <a:noFill/>
@@ -9479,7 +9479,7 @@
             <a:avLst/>
           </a:prstGeom>
           <a:solidFill>
-            <a:srgbClr val="156826"/>
+            <a:srgbClr val="31662F"/>
           </a:solidFill>
           <a:ln>
             <a:noFill/>
@@ -9523,7 +9523,7 @@
             <a:avLst/>
           </a:prstGeom>
           <a:solidFill>
-            <a:srgbClr val="A7B097"/>
+            <a:srgbClr val="B1BCB1"/>
           </a:solidFill>
           <a:ln>
             <a:noFill/>
@@ -9567,7 +9567,7 @@
             <a:avLst/>
           </a:prstGeom>
           <a:solidFill>
-            <a:srgbClr val="A7B097"/>
+            <a:srgbClr val="B1BCB1"/>
           </a:solidFill>
           <a:ln>
             <a:noFill/>
@@ -9610,7 +9610,7 @@
     <p:bg>
       <p:bgPr>
         <a:solidFill>
-          <a:srgbClr val="F4F1EA"/>
+          <a:srgbClr val="F3F1EA"/>
         </a:solidFill>
         <a:effectLst/>
       </p:bgPr>
@@ -9637,7 +9637,7 @@
             <a:avLst/>
           </a:prstGeom>
           <a:solidFill>
-            <a:srgbClr val="A7B097"/>
+            <a:srgbClr val="B1BCB1"/>
           </a:solidFill>
           <a:ln>
             <a:noFill/>
@@ -9681,7 +9681,7 @@
             <a:avLst/>
           </a:prstGeom>
           <a:solidFill>
-            <a:srgbClr val="A7B097"/>
+            <a:srgbClr val="B1BCB1"/>
           </a:solidFill>
           <a:ln>
             <a:noFill/>
@@ -9725,7 +9725,7 @@
             <a:avLst/>
           </a:prstGeom>
           <a:solidFill>
-            <a:srgbClr val="A7B097"/>
+            <a:srgbClr val="B1BCB1"/>
           </a:solidFill>
           <a:ln>
             <a:noFill/>
@@ -9769,7 +9769,7 @@
             <a:avLst/>
           </a:prstGeom>
           <a:solidFill>
-            <a:srgbClr val="A7B097"/>
+            <a:srgbClr val="B1BCB1"/>
           </a:solidFill>
           <a:ln>
             <a:noFill/>
@@ -9813,7 +9813,7 @@
             <a:avLst/>
           </a:prstGeom>
           <a:solidFill>
-            <a:srgbClr val="A7B097"/>
+            <a:srgbClr val="B1BCB1"/>
           </a:solidFill>
           <a:ln>
             <a:noFill/>
@@ -9857,7 +9857,7 @@
             <a:avLst/>
           </a:prstGeom>
           <a:solidFill>
-            <a:srgbClr val="A7B097"/>
+            <a:srgbClr val="B1BCB1"/>
           </a:solidFill>
           <a:ln>
             <a:noFill/>
@@ -9901,7 +9901,7 @@
             <a:avLst/>
           </a:prstGeom>
           <a:solidFill>
-            <a:srgbClr val="A7B097"/>
+            <a:srgbClr val="B1BCB1"/>
           </a:solidFill>
           <a:ln>
             <a:noFill/>
@@ -9945,7 +9945,7 @@
             <a:avLst/>
           </a:prstGeom>
           <a:solidFill>
-            <a:srgbClr val="A7B097"/>
+            <a:srgbClr val="B1BCB1"/>
           </a:solidFill>
           <a:ln>
             <a:noFill/>
@@ -9989,7 +9989,7 @@
             <a:avLst/>
           </a:prstGeom>
           <a:solidFill>
-            <a:srgbClr val="A7B097"/>
+            <a:srgbClr val="B1BCB1"/>
           </a:solidFill>
           <a:ln>
             <a:noFill/>
@@ -10033,7 +10033,7 @@
             <a:avLst/>
           </a:prstGeom>
           <a:solidFill>
-            <a:srgbClr val="A7B097"/>
+            <a:srgbClr val="B1BCB1"/>
           </a:solidFill>
           <a:ln>
             <a:noFill/>
@@ -10077,7 +10077,7 @@
             <a:avLst/>
           </a:prstGeom>
           <a:solidFill>
-            <a:srgbClr val="A7B097"/>
+            <a:srgbClr val="B1BCB1"/>
           </a:solidFill>
           <a:ln>
             <a:noFill/>
@@ -10121,7 +10121,7 @@
             <a:avLst/>
           </a:prstGeom>
           <a:solidFill>
-            <a:srgbClr val="A7B097"/>
+            <a:srgbClr val="B1BCB1"/>
           </a:solidFill>
           <a:ln>
             <a:noFill/>
@@ -10165,7 +10165,7 @@
             <a:avLst/>
           </a:prstGeom>
           <a:solidFill>
-            <a:srgbClr val="A7B097"/>
+            <a:srgbClr val="B1BCB1"/>
           </a:solidFill>
           <a:ln>
             <a:noFill/>
@@ -10209,7 +10209,7 @@
             <a:avLst/>
           </a:prstGeom>
           <a:solidFill>
-            <a:srgbClr val="A7B097"/>
+            <a:srgbClr val="B1BCB1"/>
           </a:solidFill>
           <a:ln>
             <a:noFill/>
@@ -10253,7 +10253,7 @@
             <a:avLst/>
           </a:prstGeom>
           <a:solidFill>
-            <a:srgbClr val="A7B097"/>
+            <a:srgbClr val="B1BCB1"/>
           </a:solidFill>
           <a:ln>
             <a:noFill/>
@@ -10297,7 +10297,7 @@
             <a:avLst/>
           </a:prstGeom>
           <a:solidFill>
-            <a:srgbClr val="A7B097"/>
+            <a:srgbClr val="B1BCB1"/>
           </a:solidFill>
           <a:ln>
             <a:noFill/>
@@ -10341,7 +10341,7 @@
             <a:avLst/>
           </a:prstGeom>
           <a:solidFill>
-            <a:srgbClr val="A7B097"/>
+            <a:srgbClr val="B1BCB1"/>
           </a:solidFill>
           <a:ln>
             <a:noFill/>
@@ -10385,7 +10385,7 @@
             <a:avLst/>
           </a:prstGeom>
           <a:solidFill>
-            <a:srgbClr val="A7B097"/>
+            <a:srgbClr val="B1BCB1"/>
           </a:solidFill>
           <a:ln>
             <a:noFill/>
@@ -10429,7 +10429,7 @@
             <a:avLst/>
           </a:prstGeom>
           <a:solidFill>
-            <a:srgbClr val="A7B097"/>
+            <a:srgbClr val="B1BCB1"/>
           </a:solidFill>
           <a:ln>
             <a:noFill/>
@@ -10473,7 +10473,7 @@
             <a:avLst/>
           </a:prstGeom>
           <a:solidFill>
-            <a:srgbClr val="A7B097"/>
+            <a:srgbClr val="B1BCB1"/>
           </a:solidFill>
           <a:ln>
             <a:noFill/>
@@ -10528,7 +10528,7 @@
             <a:r>
               <a:rPr sz="3000" b="1" i="0">
                 <a:solidFill>
-                  <a:srgbClr val="156826"/>
+                  <a:srgbClr val="31662F"/>
                 </a:solidFill>
                 <a:latin typeface="Montserrat"/>
               </a:rPr>
@@ -10540,7 +10540,7 @@
             <a:r>
               <a:rPr sz="3000" b="1" i="0">
                 <a:solidFill>
-                  <a:srgbClr val="156826"/>
+                  <a:srgbClr val="31662F"/>
                 </a:solidFill>
                 <a:latin typeface="Montserrat"/>
               </a:rPr>
@@ -10575,7 +10575,7 @@
             <a:r>
               <a:rPr sz="3000" b="1" i="0">
                 <a:solidFill>
-                  <a:srgbClr val="156826"/>
+                  <a:srgbClr val="31662F"/>
                 </a:solidFill>
                 <a:latin typeface="Montserrat"/>
               </a:rPr>
@@ -10614,7 +10614,7 @@
             <a:r>
               <a:rPr sz="5700" b="0" i="0">
                 <a:solidFill>
-                  <a:srgbClr val="22371F"/>
+                  <a:srgbClr val="1E3F1D"/>
                 </a:solidFill>
                 <a:latin typeface="EB Garamond"/>
               </a:rPr>
@@ -10638,7 +10638,7 @@
             <a:avLst/>
           </a:prstGeom>
           <a:solidFill>
-            <a:srgbClr val="A7B097"/>
+            <a:srgbClr val="B1BCB1"/>
           </a:solidFill>
           <a:ln>
             <a:noFill/>
@@ -10682,7 +10682,7 @@
             <a:avLst/>
           </a:prstGeom>
           <a:solidFill>
-            <a:srgbClr val="A7B097"/>
+            <a:srgbClr val="B1BCB1"/>
           </a:solidFill>
           <a:ln>
             <a:noFill/>
@@ -10726,7 +10726,7 @@
             <a:avLst/>
           </a:prstGeom>
           <a:solidFill>
-            <a:srgbClr val="A7B097"/>
+            <a:srgbClr val="B1BCB1"/>
           </a:solidFill>
           <a:ln>
             <a:noFill/>
@@ -10770,7 +10770,7 @@
             <a:avLst/>
           </a:prstGeom>
           <a:solidFill>
-            <a:srgbClr val="A7B097"/>
+            <a:srgbClr val="B1BCB1"/>
           </a:solidFill>
           <a:ln>
             <a:noFill/>
@@ -10814,7 +10814,7 @@
             <a:avLst/>
           </a:prstGeom>
           <a:solidFill>
-            <a:srgbClr val="156826"/>
+            <a:srgbClr val="31662F"/>
           </a:solidFill>
           <a:ln>
             <a:noFill/>
@@ -10858,7 +10858,7 @@
             <a:avLst/>
           </a:prstGeom>
           <a:solidFill>
-            <a:srgbClr val="A7B097"/>
+            <a:srgbClr val="B1BCB1"/>
           </a:solidFill>
           <a:ln>
             <a:noFill/>
@@ -10901,7 +10901,7 @@
     <p:bg>
       <p:bgPr>
         <a:solidFill>
-          <a:srgbClr val="F4F1EA"/>
+          <a:srgbClr val="F3F1EA"/>
         </a:solidFill>
         <a:effectLst/>
       </p:bgPr>
@@ -10928,7 +10928,7 @@
             <a:avLst/>
           </a:prstGeom>
           <a:solidFill>
-            <a:srgbClr val="A7B097"/>
+            <a:srgbClr val="B1BCB1"/>
           </a:solidFill>
           <a:ln>
             <a:noFill/>
@@ -10972,7 +10972,7 @@
             <a:avLst/>
           </a:prstGeom>
           <a:solidFill>
-            <a:srgbClr val="A7B097"/>
+            <a:srgbClr val="B1BCB1"/>
           </a:solidFill>
           <a:ln>
             <a:noFill/>
@@ -11016,7 +11016,7 @@
             <a:avLst/>
           </a:prstGeom>
           <a:solidFill>
-            <a:srgbClr val="A7B097"/>
+            <a:srgbClr val="B1BCB1"/>
           </a:solidFill>
           <a:ln>
             <a:noFill/>
@@ -11060,7 +11060,7 @@
             <a:avLst/>
           </a:prstGeom>
           <a:solidFill>
-            <a:srgbClr val="A7B097"/>
+            <a:srgbClr val="B1BCB1"/>
           </a:solidFill>
           <a:ln>
             <a:noFill/>
@@ -11104,7 +11104,7 @@
             <a:avLst/>
           </a:prstGeom>
           <a:solidFill>
-            <a:srgbClr val="A7B097"/>
+            <a:srgbClr val="B1BCB1"/>
           </a:solidFill>
           <a:ln>
             <a:noFill/>
@@ -11148,7 +11148,7 @@
             <a:avLst/>
           </a:prstGeom>
           <a:solidFill>
-            <a:srgbClr val="A7B097"/>
+            <a:srgbClr val="B1BCB1"/>
           </a:solidFill>
           <a:ln>
             <a:noFill/>
@@ -11192,7 +11192,7 @@
             <a:avLst/>
           </a:prstGeom>
           <a:solidFill>
-            <a:srgbClr val="A7B097"/>
+            <a:srgbClr val="B1BCB1"/>
           </a:solidFill>
           <a:ln>
             <a:noFill/>
@@ -11236,7 +11236,7 @@
             <a:avLst/>
           </a:prstGeom>
           <a:solidFill>
-            <a:srgbClr val="A7B097"/>
+            <a:srgbClr val="B1BCB1"/>
           </a:solidFill>
           <a:ln>
             <a:noFill/>
@@ -11280,7 +11280,7 @@
             <a:avLst/>
           </a:prstGeom>
           <a:solidFill>
-            <a:srgbClr val="A7B097"/>
+            <a:srgbClr val="B1BCB1"/>
           </a:solidFill>
           <a:ln>
             <a:noFill/>
@@ -11324,7 +11324,7 @@
             <a:avLst/>
           </a:prstGeom>
           <a:solidFill>
-            <a:srgbClr val="A7B097"/>
+            <a:srgbClr val="B1BCB1"/>
           </a:solidFill>
           <a:ln>
             <a:noFill/>
@@ -11368,7 +11368,7 @@
             <a:avLst/>
           </a:prstGeom>
           <a:solidFill>
-            <a:srgbClr val="A7B097"/>
+            <a:srgbClr val="B1BCB1"/>
           </a:solidFill>
           <a:ln>
             <a:noFill/>
@@ -11412,7 +11412,7 @@
             <a:avLst/>
           </a:prstGeom>
           <a:solidFill>
-            <a:srgbClr val="A7B097"/>
+            <a:srgbClr val="B1BCB1"/>
           </a:solidFill>
           <a:ln>
             <a:noFill/>
@@ -11456,7 +11456,7 @@
             <a:avLst/>
           </a:prstGeom>
           <a:solidFill>
-            <a:srgbClr val="A7B097"/>
+            <a:srgbClr val="B1BCB1"/>
           </a:solidFill>
           <a:ln>
             <a:noFill/>
@@ -11500,7 +11500,7 @@
             <a:avLst/>
           </a:prstGeom>
           <a:solidFill>
-            <a:srgbClr val="A7B097"/>
+            <a:srgbClr val="B1BCB1"/>
           </a:solidFill>
           <a:ln>
             <a:noFill/>
@@ -11544,7 +11544,7 @@
             <a:avLst/>
           </a:prstGeom>
           <a:solidFill>
-            <a:srgbClr val="A7B097"/>
+            <a:srgbClr val="B1BCB1"/>
           </a:solidFill>
           <a:ln>
             <a:noFill/>
@@ -11588,7 +11588,7 @@
             <a:avLst/>
           </a:prstGeom>
           <a:solidFill>
-            <a:srgbClr val="A7B097"/>
+            <a:srgbClr val="B1BCB1"/>
           </a:solidFill>
           <a:ln>
             <a:noFill/>
@@ -11632,7 +11632,7 @@
             <a:avLst/>
           </a:prstGeom>
           <a:solidFill>
-            <a:srgbClr val="A7B097"/>
+            <a:srgbClr val="B1BCB1"/>
           </a:solidFill>
           <a:ln>
             <a:noFill/>
@@ -11676,7 +11676,7 @@
             <a:avLst/>
           </a:prstGeom>
           <a:solidFill>
-            <a:srgbClr val="A7B097"/>
+            <a:srgbClr val="B1BCB1"/>
           </a:solidFill>
           <a:ln>
             <a:noFill/>
@@ -11720,7 +11720,7 @@
             <a:avLst/>
           </a:prstGeom>
           <a:solidFill>
-            <a:srgbClr val="A7B097"/>
+            <a:srgbClr val="B1BCB1"/>
           </a:solidFill>
           <a:ln>
             <a:noFill/>
@@ -11764,7 +11764,7 @@
             <a:avLst/>
           </a:prstGeom>
           <a:solidFill>
-            <a:srgbClr val="A7B097"/>
+            <a:srgbClr val="B1BCB1"/>
           </a:solidFill>
           <a:ln>
             <a:noFill/>
@@ -11819,7 +11819,7 @@
             <a:r>
               <a:rPr sz="3000" b="1" i="0">
                 <a:solidFill>
-                  <a:srgbClr val="156826"/>
+                  <a:srgbClr val="31662F"/>
                 </a:solidFill>
                 <a:latin typeface="Montserrat"/>
               </a:rPr>
@@ -11831,7 +11831,7 @@
             <a:r>
               <a:rPr sz="3000" b="1" i="0">
                 <a:solidFill>
-                  <a:srgbClr val="156826"/>
+                  <a:srgbClr val="31662F"/>
                 </a:solidFill>
                 <a:latin typeface="Montserrat"/>
               </a:rPr>
@@ -11866,7 +11866,7 @@
             <a:r>
               <a:rPr sz="3000" b="1" i="0">
                 <a:solidFill>
-                  <a:srgbClr val="156826"/>
+                  <a:srgbClr val="31662F"/>
                 </a:solidFill>
                 <a:latin typeface="Montserrat"/>
               </a:rPr>
@@ -11890,7 +11890,7 @@
             <a:avLst/>
           </a:prstGeom>
           <a:solidFill>
-            <a:srgbClr val="A7B097"/>
+            <a:srgbClr val="B1BCB1"/>
           </a:solidFill>
           <a:ln>
             <a:noFill/>
@@ -11945,7 +11945,7 @@
             <a:r>
               <a:rPr sz="3000" b="1" i="0">
                 <a:solidFill>
-                  <a:srgbClr val="22371F"/>
+                  <a:srgbClr val="1E3F1D"/>
                 </a:solidFill>
                 <a:latin typeface="Montserrat"/>
               </a:rPr>
@@ -11984,7 +11984,7 @@
             <a:r>
               <a:rPr sz="3750" b="1" i="0">
                 <a:solidFill>
-                  <a:srgbClr val="22371F"/>
+                  <a:srgbClr val="1E3F1D"/>
                 </a:solidFill>
                 <a:latin typeface="Montserrat"/>
               </a:rPr>
@@ -12000,7 +12000,7 @@
             <a:r>
               <a:rPr sz="3750" b="1" i="0">
                 <a:solidFill>
-                  <a:srgbClr val="22371F"/>
+                  <a:srgbClr val="1E3F1D"/>
                 </a:solidFill>
                 <a:latin typeface="Montserrat"/>
               </a:rPr>
@@ -12039,7 +12039,7 @@
             <a:r>
               <a:rPr sz="5700" b="0" i="0">
                 <a:solidFill>
-                  <a:srgbClr val="22371F"/>
+                  <a:srgbClr val="1E3F1D"/>
                 </a:solidFill>
                 <a:latin typeface="EB Garamond"/>
               </a:rPr>
@@ -12098,7 +12098,7 @@
             <a:avLst/>
           </a:prstGeom>
           <a:solidFill>
-            <a:srgbClr val="A7B097"/>
+            <a:srgbClr val="B1BCB1"/>
           </a:solidFill>
           <a:ln>
             <a:noFill/>
@@ -12142,7 +12142,7 @@
             <a:avLst/>
           </a:prstGeom>
           <a:solidFill>
-            <a:srgbClr val="A7B097"/>
+            <a:srgbClr val="B1BCB1"/>
           </a:solidFill>
           <a:ln>
             <a:noFill/>
@@ -12186,7 +12186,7 @@
             <a:avLst/>
           </a:prstGeom>
           <a:solidFill>
-            <a:srgbClr val="A7B097"/>
+            <a:srgbClr val="B1BCB1"/>
           </a:solidFill>
           <a:ln>
             <a:noFill/>
@@ -12230,7 +12230,7 @@
             <a:avLst/>
           </a:prstGeom>
           <a:solidFill>
-            <a:srgbClr val="A7B097"/>
+            <a:srgbClr val="B1BCB1"/>
           </a:solidFill>
           <a:ln>
             <a:noFill/>
@@ -12274,7 +12274,7 @@
             <a:avLst/>
           </a:prstGeom>
           <a:solidFill>
-            <a:srgbClr val="A7B097"/>
+            <a:srgbClr val="B1BCB1"/>
           </a:solidFill>
           <a:ln>
             <a:noFill/>
@@ -12318,7 +12318,7 @@
             <a:avLst/>
           </a:prstGeom>
           <a:solidFill>
-            <a:srgbClr val="156826"/>
+            <a:srgbClr val="31662F"/>
           </a:solidFill>
           <a:ln>
             <a:noFill/>
